--- a/PayKX_Bai1_PowerPoint_BaoCaoLoLai.pptx
+++ b/PayKX_Bai1_PowerPoint_BaoCaoLoLai.pptx
@@ -4,6 +4,9 @@
   <p:sldMasterIdLst>
     <p:sldMasterId id="2147483648" r:id="rId1"/>
   </p:sldMasterIdLst>
+  <p:notesMasterIdLst>
+    <p:notesMasterId r:id="rId8"/>
+  </p:notesMasterIdLst>
   <p:sldIdLst>
     <p:sldId id="256" r:id="rId2"/>
     <p:sldId id="257" r:id="rId3"/>
@@ -12,9 +15,6 @@
     <p:sldId id="260" r:id="rId6"/>
     <p:sldId id="261" r:id="rId7"/>
   </p:sldIdLst>
-  <p:notesMasterIdLst>
-    <p:notesMasterId r:id="rId8"/>
-  </p:notesMasterIdLst>
   <p:sldSz cx="12192000" cy="6858000"/>
   <p:notesSz cx="6858000" cy="12192000"/>
   <p:defaultTextStyle>
@@ -112,24 +112,24 @@
   <p:extLst>
     <p:ext uri="{521415D9-36F7-43E2-AB2F-B90AF26B5E84}">
       <p14:sectionLst xmlns:p14="http://schemas.microsoft.com/office/powerpoint/2010/main">
-        <p14:section name="Mở đầu" id="{59d79dd3-ce0f-2630-96ef-d64e2ccef07c}">
+        <p14:section name="Mở đầu" id="{59D79DD3-CE0F-2630-96EF-D64E2CCEF07C}">
           <p14:sldIdLst>
             <p14:sldId id="256"/>
           </p14:sldIdLst>
         </p14:section>
-        <p14:section name="Kết quả" id="{7463be32-b399-0721-3edd-5e810f0326a0}">
+        <p14:section name="Kết quả" id="{7463BE32-B399-0721-3EDD-5E810F0326A0}">
           <p14:sldIdLst>
             <p14:sldId id="257"/>
             <p14:sldId id="258"/>
           </p14:sldIdLst>
         </p14:section>
-        <p14:section name="Chi phí" id="{6e5546a9-ed08-b0aa-d3f2-83042e1f4c0e}">
+        <p14:section name="Chi phí" id="{6E5546A9-ED08-B0AA-D3F2-83042E1F4C0E}">
           <p14:sldIdLst>
             <p14:sldId id="259"/>
             <p14:sldId id="260"/>
           </p14:sldIdLst>
         </p14:section>
-        <p14:section name="Kết luận" id="{a85bb551-2c08-719c-a2a8-52310dc93634}">
+        <p14:section name="Kết luận" id="{A85BB551-2C08-719C-A2A8-52310DC93634}">
           <p14:sldIdLst>
             <p14:sldId id="261"/>
           </p14:sldIdLst>
@@ -144,9 +144,11 @@
 </file>
 
 <file path=ppt/charts/chart1.xml><?xml version="1.0" encoding="utf-8"?>
-<c:chartSpace xmlns:c="http://schemas.openxmlformats.org/drawingml/2006/chart" xmlns:a="http://schemas.openxmlformats.org/drawingml/2006/main" xmlns:r="http://schemas.openxmlformats.org/officeDocument/2006/relationships">
+<c:chartSpace xmlns:c="http://schemas.openxmlformats.org/drawingml/2006/chart" xmlns:a="http://schemas.openxmlformats.org/drawingml/2006/main" xmlns:r="http://schemas.openxmlformats.org/officeDocument/2006/relationships" xmlns:c16r2="http://schemas.microsoft.com/office/drawing/2015/06/chart">
   <c:date1904 val="0"/>
+  <c:lang val="en-GB"/>
   <c:roundedCorners val="1"/>
+  <c:style val="2"/>
   <c:chart>
     <c:autoTitleDeleted val="1"/>
     <c:plotArea>
@@ -176,73 +178,45 @@
             <a:effectLst/>
           </c:spPr>
           <c:invertIfNegative val="0"/>
-          <c:dLbls>
-            <c:numFmt formatCode="0.00" sourceLinked="0"/>
-            <c:txPr>
-              <a:bodyPr/>
-              <a:lstStyle/>
-              <a:p>
-                <a:pPr>
-                  <a:defRPr b="0" i="0" strike="noStrike" sz="3000" u="none">
-                    <a:solidFill>
-                      <a:srgbClr val="222222"/>
-                    </a:solidFill>
-                    <a:latin typeface="+mn-lt"/>
-                  </a:defRPr>
-                </a:pPr>
-              </a:p>
-            </c:txPr>
-            <c:showLegendKey val="0"/>
-            <c:showVal val="1"/>
-            <c:showCatName val="0"/>
-            <c:showSerName val="0"/>
-            <c:showPercent val="0"/>
-            <c:showBubbleSize val="0"/>
-            <c:showLeaderLines val="0"/>
-          </c:dLbls>
           <c:dPt>
             <c:idx val="0"/>
             <c:invertIfNegative val="0"/>
             <c:bubble3D val="0"/>
-            <c:spPr>
-              <a:solidFill>
-                <a:srgbClr val="B9BDD6"/>
-              </a:solidFill>
-              <a:effectLst/>
-            </c:spPr>
+            <c:extLst>
+              <c:ext xmlns:c16="http://schemas.microsoft.com/office/drawing/2014/chart" uri="{C3380CC4-5D6E-409C-BE32-E72D297353CC}">
+                <c16:uniqueId val="{00000001-653F-40A8-BF62-AC617F931197}"/>
+              </c:ext>
+            </c:extLst>
           </c:dPt>
           <c:dPt>
             <c:idx val="1"/>
             <c:invertIfNegative val="0"/>
             <c:bubble3D val="0"/>
-            <c:spPr>
-              <a:solidFill>
-                <a:srgbClr val="B9BDD6"/>
-              </a:solidFill>
-              <a:effectLst/>
-            </c:spPr>
+            <c:extLst>
+              <c:ext xmlns:c16="http://schemas.microsoft.com/office/drawing/2014/chart" uri="{C3380CC4-5D6E-409C-BE32-E72D297353CC}">
+                <c16:uniqueId val="{00000003-653F-40A8-BF62-AC617F931197}"/>
+              </c:ext>
+            </c:extLst>
           </c:dPt>
           <c:dPt>
             <c:idx val="2"/>
             <c:invertIfNegative val="0"/>
             <c:bubble3D val="0"/>
-            <c:spPr>
-              <a:solidFill>
-                <a:srgbClr val="B9BDD6"/>
-              </a:solidFill>
-              <a:effectLst/>
-            </c:spPr>
+            <c:extLst>
+              <c:ext xmlns:c16="http://schemas.microsoft.com/office/drawing/2014/chart" uri="{C3380CC4-5D6E-409C-BE32-E72D297353CC}">
+                <c16:uniqueId val="{00000005-653F-40A8-BF62-AC617F931197}"/>
+              </c:ext>
+            </c:extLst>
           </c:dPt>
           <c:dPt>
             <c:idx val="3"/>
             <c:invertIfNegative val="0"/>
             <c:bubble3D val="0"/>
-            <c:spPr>
-              <a:solidFill>
-                <a:srgbClr val="B9BDD6"/>
-              </a:solidFill>
-              <a:effectLst/>
-            </c:spPr>
+            <c:extLst>
+              <c:ext xmlns:c16="http://schemas.microsoft.com/office/drawing/2014/chart" uri="{C3380CC4-5D6E-409C-BE32-E72D297353CC}">
+                <c16:uniqueId val="{00000007-653F-40A8-BF62-AC617F931197}"/>
+              </c:ext>
+            </c:extLst>
           </c:dPt>
           <c:dPt>
             <c:idx val="4"/>
@@ -254,31 +228,71 @@
               </a:solidFill>
               <a:effectLst/>
             </c:spPr>
+            <c:extLst>
+              <c:ext xmlns:c16="http://schemas.microsoft.com/office/drawing/2014/chart" uri="{C3380CC4-5D6E-409C-BE32-E72D297353CC}">
+                <c16:uniqueId val="{00000009-653F-40A8-BF62-AC617F931197}"/>
+              </c:ext>
+            </c:extLst>
           </c:dPt>
+          <c:dLbls>
+            <c:numFmt formatCode="0.00" sourceLinked="0"/>
+            <c:spPr>
+              <a:noFill/>
+              <a:ln>
+                <a:noFill/>
+              </a:ln>
+              <a:effectLst/>
+            </c:spPr>
+            <c:txPr>
+              <a:bodyPr/>
+              <a:lstStyle/>
+              <a:p>
+                <a:pPr>
+                  <a:defRPr sz="3000" b="0" i="0" u="none" strike="noStrike">
+                    <a:solidFill>
+                      <a:srgbClr val="222222"/>
+                    </a:solidFill>
+                    <a:latin typeface="+mn-lt"/>
+                  </a:defRPr>
+                </a:pPr>
+                <a:endParaRPr lang="en-US"/>
+              </a:p>
+            </c:txPr>
+            <c:showLegendKey val="0"/>
+            <c:showVal val="1"/>
+            <c:showCatName val="0"/>
+            <c:showSerName val="0"/>
+            <c:showPercent val="0"/>
+            <c:showBubbleSize val="0"/>
+            <c:showLeaderLines val="0"/>
+            <c:extLst>
+              <c:ext xmlns:c15="http://schemas.microsoft.com/office/drawing/2012/chart" uri="{CE6537A1-D6FC-4f65-9D91-7224C49458BB}">
+                <c15:showLeaderLines val="0"/>
+              </c:ext>
+            </c:extLst>
+          </c:dLbls>
           <c:cat>
-            <c:multiLvlStrRef>
+            <c:strRef>
               <c:f>Sheet1!$A$2:$A$6</c:f>
-              <c:multiLvlStrCache>
+              <c:strCache>
                 <c:ptCount val="5"/>
-                <c:lvl>
-                  <c:pt idx="0">
-                    <c:v>T01</c:v>
-                  </c:pt>
-                  <c:pt idx="1">
-                    <c:v>T02</c:v>
-                  </c:pt>
-                  <c:pt idx="2">
-                    <c:v>T03</c:v>
-                  </c:pt>
-                  <c:pt idx="3">
-                    <c:v>T04</c:v>
-                  </c:pt>
-                  <c:pt idx="4">
-                    <c:v>T05</c:v>
-                  </c:pt>
-                </c:lvl>
-              </c:multiLvlStrCache>
-            </c:multiLvlStrRef>
+                <c:pt idx="0">
+                  <c:v>T01</c:v>
+                </c:pt>
+                <c:pt idx="1">
+                  <c:v>T02</c:v>
+                </c:pt>
+                <c:pt idx="2">
+                  <c:v>T03</c:v>
+                </c:pt>
+                <c:pt idx="3">
+                  <c:v>T04</c:v>
+                </c:pt>
+                <c:pt idx="4">
+                  <c:v>T05</c:v>
+                </c:pt>
+              </c:strCache>
+            </c:strRef>
           </c:cat>
           <c:val>
             <c:numRef>
@@ -304,36 +318,23 @@
               </c:numCache>
             </c:numRef>
           </c:val>
+          <c:extLst>
+            <c:ext xmlns:c16="http://schemas.microsoft.com/office/drawing/2014/chart" uri="{C3380CC4-5D6E-409C-BE32-E72D297353CC}">
+              <c16:uniqueId val="{0000000A-653F-40A8-BF62-AC617F931197}"/>
+            </c:ext>
+          </c:extLst>
         </c:ser>
         <c:dLbls>
-          <c:numFmt formatCode="0.00" sourceLinked="0"/>
-          <c:txPr>
-            <a:bodyPr/>
-            <a:lstStyle/>
-            <a:p>
-              <a:pPr>
-                <a:defRPr b="0" i="0" strike="noStrike" sz="3000" u="none">
-                  <a:solidFill>
-                    <a:srgbClr val="222222"/>
-                  </a:solidFill>
-                  <a:latin typeface="+mn-lt"/>
-                </a:defRPr>
-              </a:pPr>
-            </a:p>
-          </c:txPr>
           <c:showLegendKey val="0"/>
           <c:showVal val="1"/>
           <c:showCatName val="0"/>
           <c:showSerName val="0"/>
           <c:showPercent val="0"/>
           <c:showBubbleSize val="0"/>
-          <c:showLeaderLines val="0"/>
         </c:dLbls>
         <c:gapWidth val="50"/>
-        <c:overlap val="0"/>
         <c:axId val="2094734554"/>
         <c:axId val="2094734552"/>
-        <c:axId val="2094734556"/>
       </c:barChart>
       <c:catAx>
         <c:axId val="2094734554"/>
@@ -374,6 +375,7 @@
         <c:crosses val="autoZero"/>
         <c:auto val="1"/>
         <c:lblAlgn val="ctr"/>
+        <c:lblOffset val="100"/>
         <c:noMultiLvlLbl val="1"/>
       </c:catAx>
       <c:valAx>
@@ -389,30 +391,6 @@
         <c:majorTickMark val="out"/>
         <c:minorTickMark val="none"/>
         <c:tickLblPos val="nextTo"/>
-        <c:spPr>
-          <a:ln w="12700" cap="flat">
-            <a:solidFill>
-              <a:srgbClr val="888888"/>
-            </a:solidFill>
-            <a:prstDash val="solid"/>
-            <a:round/>
-          </a:ln>
-        </c:spPr>
-        <c:txPr>
-          <a:bodyPr/>
-          <a:lstStyle/>
-          <a:p>
-            <a:pPr>
-              <a:defRPr sz="3000" b="0" i="0" u="none" strike="noStrike">
-                <a:solidFill>
-                  <a:srgbClr val="222222"/>
-                </a:solidFill>
-                <a:latin typeface="+mn-lt"/>
-              </a:defRPr>
-            </a:pPr>
-            <a:endParaRPr lang="en-US"/>
-          </a:p>
-        </c:txPr>
         <c:crossAx val="2094734554"/>
         <c:crosses val="autoZero"/>
         <c:crossBetween val="between"/>
@@ -427,6 +405,7 @@
     </c:plotArea>
     <c:plotVisOnly val="1"/>
     <c:dispBlanksAs val="span"/>
+    <c:showDLblsOverMax val="1"/>
   </c:chart>
   <c:spPr>
     <a:noFill/>
@@ -442,9 +421,11 @@
 </file>
 
 <file path=ppt/charts/chart2.xml><?xml version="1.0" encoding="utf-8"?>
-<c:chartSpace xmlns:c="http://schemas.openxmlformats.org/drawingml/2006/chart" xmlns:a="http://schemas.openxmlformats.org/drawingml/2006/main" xmlns:r="http://schemas.openxmlformats.org/officeDocument/2006/relationships">
+<c:chartSpace xmlns:c="http://schemas.openxmlformats.org/drawingml/2006/chart" xmlns:a="http://schemas.openxmlformats.org/drawingml/2006/main" xmlns:r="http://schemas.openxmlformats.org/officeDocument/2006/relationships" xmlns:c16r2="http://schemas.microsoft.com/office/drawing/2015/06/chart">
   <c:date1904 val="0"/>
+  <c:lang val="en-GB"/>
   <c:roundedCorners val="1"/>
+  <c:style val="2"/>
   <c:chart>
     <c:autoTitleDeleted val="1"/>
     <c:plotArea>
@@ -476,18 +457,26 @@
           <c:invertIfNegative val="0"/>
           <c:dLbls>
             <c:numFmt formatCode="0.00" sourceLinked="0"/>
+            <c:spPr>
+              <a:noFill/>
+              <a:ln>
+                <a:noFill/>
+              </a:ln>
+              <a:effectLst/>
+            </c:spPr>
             <c:txPr>
               <a:bodyPr/>
               <a:lstStyle/>
               <a:p>
                 <a:pPr>
-                  <a:defRPr b="0" i="0" strike="noStrike" sz="3000" u="none">
+                  <a:defRPr sz="3000" b="0" i="0" u="none" strike="noStrike">
                     <a:solidFill>
                       <a:srgbClr val="222222"/>
                     </a:solidFill>
                     <a:latin typeface="+mn-lt"/>
                   </a:defRPr>
                 </a:pPr>
+                <a:endParaRPr lang="en-US"/>
               </a:p>
             </c:txPr>
             <c:showLegendKey val="0"/>
@@ -497,25 +486,28 @@
             <c:showPercent val="0"/>
             <c:showBubbleSize val="0"/>
             <c:showLeaderLines val="0"/>
+            <c:extLst>
+              <c:ext xmlns:c15="http://schemas.microsoft.com/office/drawing/2012/chart" uri="{CE6537A1-D6FC-4f65-9D91-7224C49458BB}">
+                <c15:showLeaderLines val="0"/>
+              </c:ext>
+            </c:extLst>
           </c:dLbls>
           <c:cat>
-            <c:multiLvlStrRef>
+            <c:strRef>
               <c:f>Sheet1!$A$2:$A$4</c:f>
-              <c:multiLvlStrCache>
+              <c:strCache>
                 <c:ptCount val="3"/>
-                <c:lvl>
-                  <c:pt idx="0">
-                    <c:v>Doanh thu</c:v>
-                  </c:pt>
-                  <c:pt idx="1">
-                    <c:v>Chi phí</c:v>
-                  </c:pt>
-                  <c:pt idx="2">
-                    <c:v>Lãi gộp</c:v>
-                  </c:pt>
-                </c:lvl>
-              </c:multiLvlStrCache>
-            </c:multiLvlStrRef>
+                <c:pt idx="0">
+                  <c:v>Doanh thu</c:v>
+                </c:pt>
+                <c:pt idx="1">
+                  <c:v>Chi phí</c:v>
+                </c:pt>
+                <c:pt idx="2">
+                  <c:v>Lãi gộp</c:v>
+                </c:pt>
+              </c:strCache>
+            </c:strRef>
           </c:cat>
           <c:val>
             <c:numRef>
@@ -535,6 +527,11 @@
               </c:numCache>
             </c:numRef>
           </c:val>
+          <c:extLst>
+            <c:ext xmlns:c16="http://schemas.microsoft.com/office/drawing/2014/chart" uri="{C3380CC4-5D6E-409C-BE32-E72D297353CC}">
+              <c16:uniqueId val="{00000000-E490-4607-B21F-B8362E58E071}"/>
+            </c:ext>
+          </c:extLst>
         </c:ser>
         <c:ser>
           <c:idx val="1"/>
@@ -559,18 +556,26 @@
           <c:invertIfNegative val="0"/>
           <c:dLbls>
             <c:numFmt formatCode="0.00" sourceLinked="0"/>
+            <c:spPr>
+              <a:noFill/>
+              <a:ln>
+                <a:noFill/>
+              </a:ln>
+              <a:effectLst/>
+            </c:spPr>
             <c:txPr>
               <a:bodyPr/>
               <a:lstStyle/>
               <a:p>
                 <a:pPr>
-                  <a:defRPr b="0" i="0" strike="noStrike" sz="3000" u="none">
+                  <a:defRPr sz="3000" b="0" i="0" u="none" strike="noStrike">
                     <a:solidFill>
                       <a:srgbClr val="222222"/>
                     </a:solidFill>
                     <a:latin typeface="+mn-lt"/>
                   </a:defRPr>
                 </a:pPr>
+                <a:endParaRPr lang="en-US"/>
               </a:p>
             </c:txPr>
             <c:showLegendKey val="0"/>
@@ -580,25 +585,28 @@
             <c:showPercent val="0"/>
             <c:showBubbleSize val="0"/>
             <c:showLeaderLines val="0"/>
+            <c:extLst>
+              <c:ext xmlns:c15="http://schemas.microsoft.com/office/drawing/2012/chart" uri="{CE6537A1-D6FC-4f65-9D91-7224C49458BB}">
+                <c15:showLeaderLines val="0"/>
+              </c:ext>
+            </c:extLst>
           </c:dLbls>
           <c:cat>
-            <c:multiLvlStrRef>
+            <c:strRef>
               <c:f>Sheet1!$A$2:$A$4</c:f>
-              <c:multiLvlStrCache>
+              <c:strCache>
                 <c:ptCount val="3"/>
-                <c:lvl>
-                  <c:pt idx="0">
-                    <c:v>Doanh thu</c:v>
-                  </c:pt>
-                  <c:pt idx="1">
-                    <c:v>Chi phí</c:v>
-                  </c:pt>
-                  <c:pt idx="2">
-                    <c:v>Lãi gộp</c:v>
-                  </c:pt>
-                </c:lvl>
-              </c:multiLvlStrCache>
-            </c:multiLvlStrRef>
+                <c:pt idx="0">
+                  <c:v>Doanh thu</c:v>
+                </c:pt>
+                <c:pt idx="1">
+                  <c:v>Chi phí</c:v>
+                </c:pt>
+                <c:pt idx="2">
+                  <c:v>Lãi gộp</c:v>
+                </c:pt>
+              </c:strCache>
+            </c:strRef>
           </c:cat>
           <c:val>
             <c:numRef>
@@ -618,36 +626,23 @@
               </c:numCache>
             </c:numRef>
           </c:val>
+          <c:extLst>
+            <c:ext xmlns:c16="http://schemas.microsoft.com/office/drawing/2014/chart" uri="{C3380CC4-5D6E-409C-BE32-E72D297353CC}">
+              <c16:uniqueId val="{00000001-E490-4607-B21F-B8362E58E071}"/>
+            </c:ext>
+          </c:extLst>
         </c:ser>
         <c:dLbls>
-          <c:numFmt formatCode="0.00" sourceLinked="0"/>
-          <c:txPr>
-            <a:bodyPr/>
-            <a:lstStyle/>
-            <a:p>
-              <a:pPr>
-                <a:defRPr b="0" i="0" strike="noStrike" sz="3000" u="none">
-                  <a:solidFill>
-                    <a:srgbClr val="222222"/>
-                  </a:solidFill>
-                  <a:latin typeface="+mn-lt"/>
-                </a:defRPr>
-              </a:pPr>
-            </a:p>
-          </c:txPr>
           <c:showLegendKey val="0"/>
           <c:showVal val="1"/>
           <c:showCatName val="0"/>
           <c:showSerName val="0"/>
           <c:showPercent val="0"/>
           <c:showBubbleSize val="0"/>
-          <c:showLeaderLines val="0"/>
         </c:dLbls>
         <c:gapWidth val="60"/>
-        <c:overlap val="0"/>
         <c:axId val="2094734554"/>
         <c:axId val="2094734552"/>
-        <c:axId val="2094734556"/>
       </c:barChart>
       <c:catAx>
         <c:axId val="2094734554"/>
@@ -688,6 +683,7 @@
         <c:crosses val="autoZero"/>
         <c:auto val="1"/>
         <c:lblAlgn val="ctr"/>
+        <c:lblOffset val="100"/>
         <c:noMultiLvlLbl val="1"/>
       </c:catAx>
       <c:valAx>
@@ -703,30 +699,6 @@
         <c:majorTickMark val="out"/>
         <c:minorTickMark val="none"/>
         <c:tickLblPos val="nextTo"/>
-        <c:spPr>
-          <a:ln w="12700" cap="flat">
-            <a:solidFill>
-              <a:srgbClr val="888888"/>
-            </a:solidFill>
-            <a:prstDash val="solid"/>
-            <a:round/>
-          </a:ln>
-        </c:spPr>
-        <c:txPr>
-          <a:bodyPr/>
-          <a:lstStyle/>
-          <a:p>
-            <a:pPr>
-              <a:defRPr sz="3000" b="0" i="0" u="none" strike="noStrike">
-                <a:solidFill>
-                  <a:srgbClr val="222222"/>
-                </a:solidFill>
-                <a:latin typeface="+mn-lt"/>
-              </a:defRPr>
-            </a:pPr>
-            <a:endParaRPr lang="en-US"/>
-          </a:p>
-        </c:txPr>
         <c:crossAx val="2094734554"/>
         <c:crosses val="autoZero"/>
         <c:crossBetween val="between"/>
@@ -761,6 +733,7 @@
     </c:legend>
     <c:plotVisOnly val="1"/>
     <c:dispBlanksAs val="span"/>
+    <c:showDLblsOverMax val="1"/>
   </c:chart>
   <c:spPr>
     <a:noFill/>
@@ -776,9 +749,11 @@
 </file>
 
 <file path=ppt/charts/chart3.xml><?xml version="1.0" encoding="utf-8"?>
-<c:chartSpace xmlns:c="http://schemas.openxmlformats.org/drawingml/2006/chart" xmlns:a="http://schemas.openxmlformats.org/drawingml/2006/main" xmlns:r="http://schemas.openxmlformats.org/officeDocument/2006/relationships">
+<c:chartSpace xmlns:c="http://schemas.openxmlformats.org/drawingml/2006/chart" xmlns:a="http://schemas.openxmlformats.org/drawingml/2006/main" xmlns:r="http://schemas.openxmlformats.org/officeDocument/2006/relationships" xmlns:c16r2="http://schemas.microsoft.com/office/drawing/2015/06/chart">
   <c:date1904 val="0"/>
+  <c:lang val="en-GB"/>
   <c:roundedCorners val="1"/>
+  <c:style val="2"/>
   <c:chart>
     <c:autoTitleDeleted val="1"/>
     <c:plotArea>
@@ -821,6 +796,11 @@
               </a:solidFill>
               <a:effectLst/>
             </c:spPr>
+            <c:extLst>
+              <c:ext xmlns:c16="http://schemas.microsoft.com/office/drawing/2014/chart" uri="{C3380CC4-5D6E-409C-BE32-E72D297353CC}">
+                <c16:uniqueId val="{00000001-5A08-4949-8064-323C493F03C3}"/>
+              </c:ext>
+            </c:extLst>
           </c:dPt>
           <c:dPt>
             <c:idx val="1"/>
@@ -831,6 +811,11 @@
               </a:solidFill>
               <a:effectLst/>
             </c:spPr>
+            <c:extLst>
+              <c:ext xmlns:c16="http://schemas.microsoft.com/office/drawing/2014/chart" uri="{C3380CC4-5D6E-409C-BE32-E72D297353CC}">
+                <c16:uniqueId val="{00000003-5A08-4949-8064-323C493F03C3}"/>
+              </c:ext>
+            </c:extLst>
           </c:dPt>
           <c:dPt>
             <c:idx val="2"/>
@@ -841,6 +826,11 @@
               </a:solidFill>
               <a:effectLst/>
             </c:spPr>
+            <c:extLst>
+              <c:ext xmlns:c16="http://schemas.microsoft.com/office/drawing/2014/chart" uri="{C3380CC4-5D6E-409C-BE32-E72D297353CC}">
+                <c16:uniqueId val="{00000005-5A08-4949-8064-323C493F03C3}"/>
+              </c:ext>
+            </c:extLst>
           </c:dPt>
           <c:dLbls>
             <c:dLbl>
@@ -859,6 +849,7 @@
                       <a:latin typeface="+mn-lt"/>
                     </a:defRPr>
                   </a:pPr>
+                  <a:endParaRPr lang="en-US"/>
                 </a:p>
               </c:txPr>
               <c:showLegendKey val="0"/>
@@ -867,6 +858,12 @@
               <c:showSerName val="0"/>
               <c:showPercent val="1"/>
               <c:showBubbleSize val="0"/>
+              <c:extLst>
+                <c:ext xmlns:c15="http://schemas.microsoft.com/office/drawing/2012/chart" uri="{CE6537A1-D6FC-4f65-9D91-7224C49458BB}"/>
+                <c:ext xmlns:c16="http://schemas.microsoft.com/office/drawing/2014/chart" uri="{C3380CC4-5D6E-409C-BE32-E72D297353CC}">
+                  <c16:uniqueId val="{00000001-5A08-4949-8064-323C493F03C3}"/>
+                </c:ext>
+              </c:extLst>
             </c:dLbl>
             <c:dLbl>
               <c:idx val="1"/>
@@ -884,6 +881,7 @@
                       <a:latin typeface="+mn-lt"/>
                     </a:defRPr>
                   </a:pPr>
+                  <a:endParaRPr lang="en-US"/>
                 </a:p>
               </c:txPr>
               <c:showLegendKey val="0"/>
@@ -892,6 +890,12 @@
               <c:showSerName val="0"/>
               <c:showPercent val="1"/>
               <c:showBubbleSize val="0"/>
+              <c:extLst>
+                <c:ext xmlns:c15="http://schemas.microsoft.com/office/drawing/2012/chart" uri="{CE6537A1-D6FC-4f65-9D91-7224C49458BB}"/>
+                <c:ext xmlns:c16="http://schemas.microsoft.com/office/drawing/2014/chart" uri="{C3380CC4-5D6E-409C-BE32-E72D297353CC}">
+                  <c16:uniqueId val="{00000003-5A08-4949-8064-323C493F03C3}"/>
+                </c:ext>
+              </c:extLst>
             </c:dLbl>
             <c:dLbl>
               <c:idx val="2"/>
@@ -909,6 +913,7 @@
                       <a:latin typeface="+mn-lt"/>
                     </a:defRPr>
                   </a:pPr>
+                  <a:endParaRPr lang="en-US"/>
                 </a:p>
               </c:txPr>
               <c:showLegendKey val="0"/>
@@ -917,8 +922,21 @@
               <c:showSerName val="0"/>
               <c:showPercent val="1"/>
               <c:showBubbleSize val="0"/>
+              <c:extLst>
+                <c:ext xmlns:c15="http://schemas.microsoft.com/office/drawing/2012/chart" uri="{CE6537A1-D6FC-4f65-9D91-7224C49458BB}"/>
+                <c:ext xmlns:c16="http://schemas.microsoft.com/office/drawing/2014/chart" uri="{C3380CC4-5D6E-409C-BE32-E72D297353CC}">
+                  <c16:uniqueId val="{00000005-5A08-4949-8064-323C493F03C3}"/>
+                </c:ext>
+              </c:extLst>
             </c:dLbl>
             <c:numFmt formatCode="0%" sourceLinked="0"/>
+            <c:spPr>
+              <a:noFill/>
+              <a:ln>
+                <a:noFill/>
+              </a:ln>
+              <a:effectLst/>
+            </c:spPr>
             <c:txPr>
               <a:bodyPr/>
               <a:lstStyle/>
@@ -931,6 +949,7 @@
                     <a:latin typeface="Arial"/>
                   </a:defRPr>
                 </a:pPr>
+                <a:endParaRPr lang="en-US"/>
               </a:p>
             </c:txPr>
             <c:dLblPos val="ctr"/>
@@ -941,6 +960,9 @@
             <c:showPercent val="1"/>
             <c:showBubbleSize val="0"/>
             <c:showLeaderLines val="0"/>
+            <c:extLst>
+              <c:ext xmlns:c15="http://schemas.microsoft.com/office/drawing/2012/chart" uri="{CE6537A1-D6FC-4f65-9D91-7224C49458BB}"/>
+            </c:extLst>
           </c:dLbls>
           <c:cat>
             <c:strRef>
@@ -963,6 +985,7 @@
             <c:numRef>
               <c:f>Sheet1!$B$2:$B$4</c:f>
               <c:numCache>
+                <c:formatCode>General</c:formatCode>
                 <c:ptCount val="3"/>
                 <c:pt idx="0">
                   <c:v>3.5</c:v>
@@ -976,7 +999,21 @@
               </c:numCache>
             </c:numRef>
           </c:val>
+          <c:extLst>
+            <c:ext xmlns:c16="http://schemas.microsoft.com/office/drawing/2014/chart" uri="{C3380CC4-5D6E-409C-BE32-E72D297353CC}">
+              <c16:uniqueId val="{00000006-5A08-4949-8064-323C493F03C3}"/>
+            </c:ext>
+          </c:extLst>
         </c:ser>
+        <c:dLbls>
+          <c:showLegendKey val="0"/>
+          <c:showVal val="0"/>
+          <c:showCatName val="0"/>
+          <c:showSerName val="0"/>
+          <c:showPercent val="0"/>
+          <c:showBubbleSize val="0"/>
+          <c:showLeaderLines val="0"/>
+        </c:dLbls>
         <c:firstSliceAng val="0"/>
       </c:pieChart>
       <c:spPr>
@@ -1009,6 +1046,7 @@
     </c:legend>
     <c:plotVisOnly val="1"/>
     <c:dispBlanksAs val="span"/>
+    <c:showDLblsOverMax val="1"/>
   </c:chart>
   <c:spPr>
     <a:noFill/>
@@ -1024,9 +1062,11 @@
 </file>
 
 <file path=ppt/charts/chart4.xml><?xml version="1.0" encoding="utf-8"?>
-<c:chartSpace xmlns:c="http://schemas.openxmlformats.org/drawingml/2006/chart" xmlns:a="http://schemas.openxmlformats.org/drawingml/2006/main" xmlns:r="http://schemas.openxmlformats.org/officeDocument/2006/relationships">
+<c:chartSpace xmlns:c="http://schemas.openxmlformats.org/drawingml/2006/chart" xmlns:a="http://schemas.openxmlformats.org/drawingml/2006/main" xmlns:r="http://schemas.openxmlformats.org/officeDocument/2006/relationships" xmlns:c16r2="http://schemas.microsoft.com/office/drawing/2015/06/chart">
   <c:date1904 val="0"/>
+  <c:lang val="en-GB"/>
   <c:roundedCorners val="1"/>
+  <c:style val="2"/>
   <c:chart>
     <c:autoTitleDeleted val="1"/>
     <c:plotArea>
@@ -1056,73 +1096,45 @@
             <a:effectLst/>
           </c:spPr>
           <c:invertIfNegative val="0"/>
-          <c:dLbls>
-            <c:numFmt formatCode="0.0" sourceLinked="0"/>
-            <c:txPr>
-              <a:bodyPr/>
-              <a:lstStyle/>
-              <a:p>
-                <a:pPr>
-                  <a:defRPr b="0" i="0" strike="noStrike" sz="3000" u="none">
-                    <a:solidFill>
-                      <a:srgbClr val="222222"/>
-                    </a:solidFill>
-                    <a:latin typeface="+mn-lt"/>
-                  </a:defRPr>
-                </a:pPr>
-              </a:p>
-            </c:txPr>
-            <c:showLegendKey val="0"/>
-            <c:showVal val="1"/>
-            <c:showCatName val="0"/>
-            <c:showSerName val="0"/>
-            <c:showPercent val="0"/>
-            <c:showBubbleSize val="0"/>
-            <c:showLeaderLines val="0"/>
-          </c:dLbls>
           <c:dPt>
             <c:idx val="0"/>
             <c:invertIfNegative val="0"/>
             <c:bubble3D val="0"/>
-            <c:spPr>
-              <a:solidFill>
-                <a:srgbClr val="B9BDD6"/>
-              </a:solidFill>
-              <a:effectLst/>
-            </c:spPr>
+            <c:extLst>
+              <c:ext xmlns:c16="http://schemas.microsoft.com/office/drawing/2014/chart" uri="{C3380CC4-5D6E-409C-BE32-E72D297353CC}">
+                <c16:uniqueId val="{00000001-0F5C-4768-956F-A69D75590F5E}"/>
+              </c:ext>
+            </c:extLst>
           </c:dPt>
           <c:dPt>
             <c:idx val="1"/>
             <c:invertIfNegative val="0"/>
             <c:bubble3D val="0"/>
-            <c:spPr>
-              <a:solidFill>
-                <a:srgbClr val="B9BDD6"/>
-              </a:solidFill>
-              <a:effectLst/>
-            </c:spPr>
+            <c:extLst>
+              <c:ext xmlns:c16="http://schemas.microsoft.com/office/drawing/2014/chart" uri="{C3380CC4-5D6E-409C-BE32-E72D297353CC}">
+                <c16:uniqueId val="{00000003-0F5C-4768-956F-A69D75590F5E}"/>
+              </c:ext>
+            </c:extLst>
           </c:dPt>
           <c:dPt>
             <c:idx val="2"/>
             <c:invertIfNegative val="0"/>
             <c:bubble3D val="0"/>
-            <c:spPr>
-              <a:solidFill>
-                <a:srgbClr val="B9BDD6"/>
-              </a:solidFill>
-              <a:effectLst/>
-            </c:spPr>
+            <c:extLst>
+              <c:ext xmlns:c16="http://schemas.microsoft.com/office/drawing/2014/chart" uri="{C3380CC4-5D6E-409C-BE32-E72D297353CC}">
+                <c16:uniqueId val="{00000005-0F5C-4768-956F-A69D75590F5E}"/>
+              </c:ext>
+            </c:extLst>
           </c:dPt>
           <c:dPt>
             <c:idx val="3"/>
             <c:invertIfNegative val="0"/>
             <c:bubble3D val="0"/>
-            <c:spPr>
-              <a:solidFill>
-                <a:srgbClr val="B9BDD6"/>
-              </a:solidFill>
-              <a:effectLst/>
-            </c:spPr>
+            <c:extLst>
+              <c:ext xmlns:c16="http://schemas.microsoft.com/office/drawing/2014/chart" uri="{C3380CC4-5D6E-409C-BE32-E72D297353CC}">
+                <c16:uniqueId val="{00000007-0F5C-4768-956F-A69D75590F5E}"/>
+              </c:ext>
+            </c:extLst>
           </c:dPt>
           <c:dPt>
             <c:idx val="4"/>
@@ -1134,31 +1146,71 @@
               </a:solidFill>
               <a:effectLst/>
             </c:spPr>
+            <c:extLst>
+              <c:ext xmlns:c16="http://schemas.microsoft.com/office/drawing/2014/chart" uri="{C3380CC4-5D6E-409C-BE32-E72D297353CC}">
+                <c16:uniqueId val="{00000009-0F5C-4768-956F-A69D75590F5E}"/>
+              </c:ext>
+            </c:extLst>
           </c:dPt>
+          <c:dLbls>
+            <c:numFmt formatCode="0.0" sourceLinked="0"/>
+            <c:spPr>
+              <a:noFill/>
+              <a:ln>
+                <a:noFill/>
+              </a:ln>
+              <a:effectLst/>
+            </c:spPr>
+            <c:txPr>
+              <a:bodyPr/>
+              <a:lstStyle/>
+              <a:p>
+                <a:pPr>
+                  <a:defRPr sz="3000" b="0" i="0" u="none" strike="noStrike">
+                    <a:solidFill>
+                      <a:srgbClr val="222222"/>
+                    </a:solidFill>
+                    <a:latin typeface="+mn-lt"/>
+                  </a:defRPr>
+                </a:pPr>
+                <a:endParaRPr lang="en-US"/>
+              </a:p>
+            </c:txPr>
+            <c:showLegendKey val="0"/>
+            <c:showVal val="1"/>
+            <c:showCatName val="0"/>
+            <c:showSerName val="0"/>
+            <c:showPercent val="0"/>
+            <c:showBubbleSize val="0"/>
+            <c:showLeaderLines val="0"/>
+            <c:extLst>
+              <c:ext xmlns:c15="http://schemas.microsoft.com/office/drawing/2012/chart" uri="{CE6537A1-D6FC-4f65-9D91-7224C49458BB}">
+                <c15:showLeaderLines val="0"/>
+              </c:ext>
+            </c:extLst>
+          </c:dLbls>
           <c:cat>
-            <c:multiLvlStrRef>
+            <c:strRef>
               <c:f>Sheet1!$A$2:$A$6</c:f>
-              <c:multiLvlStrCache>
+              <c:strCache>
                 <c:ptCount val="5"/>
-                <c:lvl>
-                  <c:pt idx="0">
-                    <c:v>MB Bank</c:v>
-                  </c:pt>
-                  <c:pt idx="1">
-                    <c:v>Techcombank</c:v>
-                  </c:pt>
-                  <c:pt idx="2">
-                    <c:v>VietinBank</c:v>
-                  </c:pt>
-                  <c:pt idx="3">
-                    <c:v>BIDV</c:v>
-                  </c:pt>
-                  <c:pt idx="4">
-                    <c:v>Vietcombank</c:v>
-                  </c:pt>
-                </c:lvl>
-              </c:multiLvlStrCache>
-            </c:multiLvlStrRef>
+                <c:pt idx="0">
+                  <c:v>MB Bank</c:v>
+                </c:pt>
+                <c:pt idx="1">
+                  <c:v>Techcombank</c:v>
+                </c:pt>
+                <c:pt idx="2">
+                  <c:v>VietinBank</c:v>
+                </c:pt>
+                <c:pt idx="3">
+                  <c:v>BIDV</c:v>
+                </c:pt>
+                <c:pt idx="4">
+                  <c:v>Vietcombank</c:v>
+                </c:pt>
+              </c:strCache>
+            </c:strRef>
           </c:cat>
           <c:val>
             <c:numRef>
@@ -1184,36 +1236,23 @@
               </c:numCache>
             </c:numRef>
           </c:val>
+          <c:extLst>
+            <c:ext xmlns:c16="http://schemas.microsoft.com/office/drawing/2014/chart" uri="{C3380CC4-5D6E-409C-BE32-E72D297353CC}">
+              <c16:uniqueId val="{0000000A-0F5C-4768-956F-A69D75590F5E}"/>
+            </c:ext>
+          </c:extLst>
         </c:ser>
         <c:dLbls>
-          <c:numFmt formatCode="0.0" sourceLinked="0"/>
-          <c:txPr>
-            <a:bodyPr/>
-            <a:lstStyle/>
-            <a:p>
-              <a:pPr>
-                <a:defRPr b="0" i="0" strike="noStrike" sz="3000" u="none">
-                  <a:solidFill>
-                    <a:srgbClr val="222222"/>
-                  </a:solidFill>
-                  <a:latin typeface="+mn-lt"/>
-                </a:defRPr>
-              </a:pPr>
-            </a:p>
-          </c:txPr>
           <c:showLegendKey val="0"/>
           <c:showVal val="1"/>
           <c:showCatName val="0"/>
           <c:showSerName val="0"/>
           <c:showPercent val="0"/>
           <c:showBubbleSize val="0"/>
-          <c:showLeaderLines val="0"/>
         </c:dLbls>
         <c:gapWidth val="40"/>
-        <c:overlap val="0"/>
         <c:axId val="2094734554"/>
         <c:axId val="2094734552"/>
-        <c:axId val="2094734556"/>
       </c:barChart>
       <c:catAx>
         <c:axId val="2094734554"/>
@@ -1254,6 +1293,7 @@
         <c:crosses val="autoZero"/>
         <c:auto val="1"/>
         <c:lblAlgn val="ctr"/>
+        <c:lblOffset val="100"/>
         <c:noMultiLvlLbl val="1"/>
       </c:catAx>
       <c:valAx>
@@ -1269,30 +1309,6 @@
         <c:majorTickMark val="out"/>
         <c:minorTickMark val="none"/>
         <c:tickLblPos val="low"/>
-        <c:spPr>
-          <a:ln w="12700" cap="flat">
-            <a:solidFill>
-              <a:srgbClr val="888888"/>
-            </a:solidFill>
-            <a:prstDash val="solid"/>
-            <a:round/>
-          </a:ln>
-        </c:spPr>
-        <c:txPr>
-          <a:bodyPr/>
-          <a:lstStyle/>
-          <a:p>
-            <a:pPr>
-              <a:defRPr sz="3000" b="0" i="0" u="none" strike="noStrike">
-                <a:solidFill>
-                  <a:srgbClr val="222222"/>
-                </a:solidFill>
-                <a:latin typeface="+mn-lt"/>
-              </a:defRPr>
-            </a:pPr>
-            <a:endParaRPr lang="en-US"/>
-          </a:p>
-        </c:txPr>
         <c:crossAx val="2094734554"/>
         <c:crosses val="autoZero"/>
         <c:crossBetween val="between"/>
@@ -1307,6 +1323,7 @@
     </c:plotArea>
     <c:plotVisOnly val="1"/>
     <c:dispBlanksAs val="span"/>
+    <c:showDLblsOverMax val="1"/>
   </c:chart>
   <c:spPr>
     <a:noFill/>
@@ -1343,234 +1360,10 @@
           <a:chExt cx="0" cy="0"/>
         </a:xfrm>
       </p:grpSpPr>
-      <p:sp>
-        <p:nvSpPr>
-          <p:cNvPr id="2" name="Header Placeholder 1"/>
-          <p:cNvSpPr>
-            <a:spLocks noGrp="1"/>
-          </p:cNvSpPr>
-          <p:nvPr>
-            <p:ph type="hdr" sz="quarter"/>
-          </p:nvPr>
-        </p:nvSpPr>
-        <p:spPr>
-          <a:xfrm>
-            <a:off x="0" y="0"/>
-            <a:ext cx="2971800" cy="458788"/>
-          </a:xfrm>
-          <a:prstGeom prst="rect">
-            <a:avLst/>
-          </a:prstGeom>
-        </p:spPr>
-        <p:txBody>
-          <a:bodyPr vert="horz" lIns="91440" tIns="45720" rIns="91440" bIns="45720" rtlCol="0"/>
-          <a:lstStyle>
-            <a:lvl1pPr algn="l">
-              <a:defRPr sz="1200"/>
-            </a:lvl1pPr>
-          </a:lstStyle>
-          <a:p>
-            <a:endParaRPr lang="en-US"/>
-          </a:p>
-        </p:txBody>
-      </p:sp>
-      <p:sp>
-        <p:nvSpPr>
-          <p:cNvPr id="3" name="Date Placeholder 2"/>
-          <p:cNvSpPr>
-            <a:spLocks noGrp="1"/>
-          </p:cNvSpPr>
-          <p:nvPr>
-            <p:ph type="dt" idx="1"/>
-          </p:nvPr>
-        </p:nvSpPr>
-        <p:spPr>
-          <a:xfrm>
-            <a:off x="3884613" y="0"/>
-            <a:ext cx="2971800" cy="458788"/>
-          </a:xfrm>
-          <a:prstGeom prst="rect">
-            <a:avLst/>
-          </a:prstGeom>
-        </p:spPr>
-        <p:txBody>
-          <a:bodyPr vert="horz" lIns="91440" tIns="45720" rIns="91440" bIns="45720" rtlCol="0"/>
-          <a:lstStyle>
-            <a:lvl1pPr algn="r">
-              <a:defRPr sz="1200"/>
-            </a:lvl1pPr>
-          </a:lstStyle>
-          <a:p>
-            <a:fld id="{5282F153-3F37-0F45-9E97-73ACFA13230C}" type="datetimeFigureOut">
-              <a:rPr lang="en-US"/>
-              <a:t>7/23/19</a:t>
-            </a:fld>
-            <a:endParaRPr lang="en-US"/>
-          </a:p>
-        </p:txBody>
-      </p:sp>
-      <p:sp>
-        <p:nvSpPr>
-          <p:cNvPr id="4" name="Slide Image Placeholder 3"/>
-          <p:cNvSpPr>
-            <a:spLocks noGrp="1" noRot="1" noChangeAspect="1"/>
-          </p:cNvSpPr>
-          <p:nvPr>
-            <p:ph type="sldImg" idx="2"/>
-          </p:nvPr>
-        </p:nvSpPr>
-        <p:spPr>
-          <a:xfrm>
-            <a:off x="685800" y="1143000"/>
-            <a:ext cx="5486400" cy="3086100"/>
-          </a:xfrm>
-          <a:prstGeom prst="rect">
-            <a:avLst/>
-          </a:prstGeom>
-          <a:noFill/>
-          <a:ln w="12700">
-            <a:solidFill>
-              <a:prstClr val="black"/>
-            </a:solidFill>
-          </a:ln>
-        </p:spPr>
-        <p:txBody>
-          <a:bodyPr vert="horz" lIns="91440" tIns="45720" rIns="91440" bIns="45720" rtlCol="0" anchor="ctr"/>
-          <a:lstStyle/>
-          <a:p>
-            <a:endParaRPr lang="en-US"/>
-          </a:p>
-        </p:txBody>
-      </p:sp>
-      <p:sp>
-        <p:nvSpPr>
-          <p:cNvPr id="5" name="Notes Placeholder 4"/>
-          <p:cNvSpPr>
-            <a:spLocks noGrp="1"/>
-          </p:cNvSpPr>
-          <p:nvPr>
-            <p:ph type="body" sz="quarter" idx="3"/>
-          </p:nvPr>
-        </p:nvSpPr>
-        <p:spPr>
-          <a:xfrm>
-            <a:off x="685800" y="4400550"/>
-            <a:ext cx="5486400" cy="3600450"/>
-          </a:xfrm>
-          <a:prstGeom prst="rect">
-            <a:avLst/>
-          </a:prstGeom>
-        </p:spPr>
-        <p:txBody>
-          <a:bodyPr vert="horz" lIns="91440" tIns="45720" rIns="91440" bIns="45720" rtlCol="0"/>
-          <a:lstStyle/>
-          <a:p>
-            <a:pPr lvl="0"/>
-            <a:r>
-              <a:rPr lang="en-US"/>
-              <a:t>Click to edit Master text styles</a:t>
-            </a:r>
-          </a:p>
-          <a:p>
-            <a:pPr lvl="1"/>
-            <a:r>
-              <a:rPr lang="en-US"/>
-              <a:t>Second level</a:t>
-            </a:r>
-          </a:p>
-          <a:p>
-            <a:pPr lvl="2"/>
-            <a:r>
-              <a:rPr lang="en-US"/>
-              <a:t>Third level</a:t>
-            </a:r>
-          </a:p>
-          <a:p>
-            <a:pPr lvl="3"/>
-            <a:r>
-              <a:rPr lang="en-US"/>
-              <a:t>Fourth level</a:t>
-            </a:r>
-          </a:p>
-          <a:p>
-            <a:pPr lvl="4"/>
-            <a:r>
-              <a:rPr lang="en-US"/>
-              <a:t>Fifth level</a:t>
-            </a:r>
-          </a:p>
-        </p:txBody>
-      </p:sp>
-      <p:sp>
-        <p:nvSpPr>
-          <p:cNvPr id="6" name="Footer Placeholder 5"/>
-          <p:cNvSpPr>
-            <a:spLocks noGrp="1"/>
-          </p:cNvSpPr>
-          <p:nvPr>
-            <p:ph type="ftr" sz="quarter" idx="4"/>
-          </p:nvPr>
-        </p:nvSpPr>
-        <p:spPr>
-          <a:xfrm>
-            <a:off x="0" y="8685213"/>
-            <a:ext cx="2971800" cy="458787"/>
-          </a:xfrm>
-          <a:prstGeom prst="rect">
-            <a:avLst/>
-          </a:prstGeom>
-        </p:spPr>
-        <p:txBody>
-          <a:bodyPr vert="horz" lIns="91440" tIns="45720" rIns="91440" bIns="45720" rtlCol="0" anchor="b"/>
-          <a:lstStyle>
-            <a:lvl1pPr algn="l">
-              <a:defRPr sz="1200"/>
-            </a:lvl1pPr>
-          </a:lstStyle>
-          <a:p>
-            <a:endParaRPr lang="en-US"/>
-          </a:p>
-        </p:txBody>
-      </p:sp>
-      <p:sp>
-        <p:nvSpPr>
-          <p:cNvPr id="7" name="Slide Number Placeholder 6"/>
-          <p:cNvSpPr>
-            <a:spLocks noGrp="1"/>
-          </p:cNvSpPr>
-          <p:nvPr>
-            <p:ph type="sldNum" sz="quarter" idx="5"/>
-          </p:nvPr>
-        </p:nvSpPr>
-        <p:spPr>
-          <a:xfrm>
-            <a:off x="3884613" y="8685213"/>
-            <a:ext cx="2971800" cy="458787"/>
-          </a:xfrm>
-          <a:prstGeom prst="rect">
-            <a:avLst/>
-          </a:prstGeom>
-        </p:spPr>
-        <p:txBody>
-          <a:bodyPr vert="horz" lIns="91440" tIns="45720" rIns="91440" bIns="45720" rtlCol="0" anchor="b"/>
-          <a:lstStyle>
-            <a:lvl1pPr algn="r">
-              <a:defRPr sz="1200"/>
-            </a:lvl1pPr>
-          </a:lstStyle>
-          <a:p>
-            <a:fld id="{CE5E9CC1-C706-0F49-92D6-E571CC5EEA8F}" type="slidenum">
-              <a:rPr lang="en-US"/>
-              <a:t>‹#›</a:t>
-            </a:fld>
-            <a:endParaRPr lang="en-US"/>
-          </a:p>
-        </p:txBody>
-      </p:sp>
     </p:spTree>
     <p:extLst>
       <p:ext uri="{BB962C8B-B14F-4D97-AF65-F5344CB8AC3E}">
-        <p14:creationId xmlns:p14="http://schemas.microsoft.com/office/powerpoint/2010/main" val="1024086991"/>
+        <p14:creationId xmlns:p14="http://schemas.microsoft.com/office/powerpoint/2010/main" val="2597920143"/>
       </p:ext>
     </p:extLst>
   </p:cSld>
@@ -1718,7 +1511,6 @@
               <a:rPr lang="en-US" dirty="0"/>
               <a:t>Chào thầy/cô và các bạn. Em xin trình bày báo cáo lỗ lãi của ví điện tử PayKX trong tháng 05/2024. Bài gồm 6 slide, mỗi slide chỉ nói một ý chính.</a:t>
             </a:r>
-            <a:endParaRPr lang="en-US" dirty="0"/>
           </a:p>
         </p:txBody>
       </p:sp>
@@ -1806,7 +1598,6 @@
               <a:rPr lang="en-US" dirty="0"/>
               <a:t>Doanh thu thuần tháng 5 đạt 12,45 tỷ, tăng 18,6% so với tháng 4 (10,50 tỷ). Nguyên nhân chính là chương trình ưu đãi nạp điện thoại cho sinh viên. Cột cam là tháng đang báo cáo.</a:t>
             </a:r>
-            <a:endParaRPr lang="en-US" dirty="0"/>
           </a:p>
         </p:txBody>
       </p:sp>
@@ -1894,7 +1685,6 @@
               <a:rPr lang="en-US" dirty="0"/>
               <a:t>Doanh thu tăng 18,6% nhưng chi phí chỉ tăng 12% (từ 6,50 lên 7,28 tỷ). Nhờ vậy lãi gộp tăng từ 4,00 lên 5,17 tỷ.</a:t>
             </a:r>
-            <a:endParaRPr lang="en-US" dirty="0"/>
           </a:p>
         </p:txBody>
       </p:sp>
@@ -1982,7 +1772,6 @@
               <a:rPr lang="en-US" dirty="0"/>
               <a:t>Tổng chi phí tháng 5 là 7,28 tỷ: vận hành 3,50 tỷ (48%), marketing và hoàn tiền 2,60 tỷ (36%), nhân sự và các khoản khác 1,18 tỷ (16%).</a:t>
             </a:r>
-            <a:endParaRPr lang="en-US" dirty="0"/>
           </a:p>
         </p:txBody>
       </p:sp>
@@ -2070,7 +1859,6 @@
               <a:rPr lang="en-US" dirty="0"/>
               <a:t>Tổng phí trả cho 10 ngân hàng đối tác là khoảng 103,3 triệu đồng (xem file Excel). Vietcombank cao nhất với 21,29 triệu vì doanh số qua ngân hàng này lớn nhất.</a:t>
             </a:r>
-            <a:endParaRPr lang="en-US" dirty="0"/>
           </a:p>
         </p:txBody>
       </p:sp>
@@ -2158,7 +1946,6 @@
               <a:rPr lang="en-US" dirty="0"/>
               <a:t>Tóm lại: doanh thu 12,45 tỷ, chi phí 7,28 tỷ, lãi gộp 5,17 tỷ. Em đề xuất tiếp tục ưu đãi nạp điện thoại và đàm phán lại mức phí với các ngân hàng có doanh số lớn. Em xin cảm ơn thầy/cô và các bạn đã lắng nghe.</a:t>
             </a:r>
-            <a:endParaRPr lang="en-US" dirty="0"/>
           </a:p>
         </p:txBody>
       </p:sp>
@@ -2236,6 +2023,7 @@
         <a:solidFill>
           <a:srgbClr val="1F2A5C"/>
         </a:solidFill>
+        <a:effectLst/>
       </p:bgPr>
     </p:bg>
     <p:spTree>
@@ -2255,9 +2043,11 @@
       <p:sp>
         <p:nvSpPr>
           <p:cNvPr id="2" name="Text 0"/>
-          <p:cNvSpPr/>
+          <p:cNvSpPr>
+            <a:spLocks noGrp="1"/>
+          </p:cNvSpPr>
           <p:nvPr>
-            <p:ph idx="100" type="title" hasCustomPrompt="1"/>
+            <p:ph type="title" idx="100" hasCustomPrompt="1"/>
           </p:nvPr>
         </p:nvSpPr>
         <p:spPr>
@@ -2274,7 +2064,7 @@
         <p:txBody>
           <a:bodyPr wrap="square" rtlCol="0"/>
           <a:lstStyle>
-            <a:lvl1pPr algn="l" indent="0" marL="0">
+            <a:lvl1pPr marL="0" indent="0" algn="l">
               <a:buNone/>
               <a:defRPr lang="en-US" sz="4800" b="1" dirty="0">
                 <a:solidFill>
@@ -2284,7 +2074,7 @@
             </a:lvl1pPr>
           </a:lstStyle>
           <a:p>
-            <a:pPr algn="l" indent="0" marL="0">
+            <a:pPr marL="0" indent="0" algn="l">
               <a:buNone/>
             </a:pPr>
             <a:endParaRPr lang="en-US" sz="4800" dirty="0"/>
@@ -2307,6 +2097,7 @@
         <a:solidFill>
           <a:srgbClr val="FFFFFF"/>
         </a:solidFill>
+        <a:effectLst/>
       </p:bgPr>
     </p:bg>
     <p:spTree>
@@ -2326,9 +2117,11 @@
       <p:sp>
         <p:nvSpPr>
           <p:cNvPr id="2" name="Text 0"/>
-          <p:cNvSpPr/>
+          <p:cNvSpPr>
+            <a:spLocks noGrp="1"/>
+          </p:cNvSpPr>
           <p:nvPr>
-            <p:ph idx="100" type="title" hasCustomPrompt="1"/>
+            <p:ph type="title" idx="100" hasCustomPrompt="1"/>
           </p:nvPr>
         </p:nvSpPr>
         <p:spPr>
@@ -2345,7 +2138,7 @@
         <p:txBody>
           <a:bodyPr wrap="square" rtlCol="0"/>
           <a:lstStyle>
-            <a:lvl1pPr algn="l" indent="0" marL="0">
+            <a:lvl1pPr marL="0" indent="0" algn="l">
               <a:buNone/>
               <a:defRPr lang="en-US" sz="3600" b="1" dirty="0">
                 <a:solidFill>
@@ -2355,7 +2148,7 @@
             </a:lvl1pPr>
           </a:lstStyle>
           <a:p>
-            <a:pPr algn="l" indent="0" marL="0">
+            <a:pPr marL="0" indent="0" algn="l">
               <a:buNone/>
             </a:pPr>
             <a:endParaRPr lang="en-US" sz="3600" dirty="0"/>
@@ -2373,6 +2166,11 @@
 <file path=ppt/slideMasters/slideMaster1.xml><?xml version="1.0" encoding="utf-8"?>
 <p:sldMaster xmlns:a="http://schemas.openxmlformats.org/drawingml/2006/main" xmlns:r="http://schemas.openxmlformats.org/officeDocument/2006/relationships" xmlns:p="http://schemas.openxmlformats.org/presentationml/2006/main">
   <p:cSld>
+    <p:bg>
+      <p:bgRef idx="1001">
+        <a:schemeClr val="bg1"/>
+      </p:bgRef>
+    </p:bg>
     <p:spTree>
       <p:nvGrpSpPr>
         <p:cNvPr id="1" name=""/>
@@ -2669,9 +2467,11 @@
       <p:sp>
         <p:nvSpPr>
           <p:cNvPr id="2" name="Text 0"/>
-          <p:cNvSpPr/>
+          <p:cNvSpPr>
+            <a:spLocks noGrp="1"/>
+          </p:cNvSpPr>
           <p:nvPr>
-            <p:ph idx="100" type="title" hasCustomPrompt="1"/>
+            <p:ph type="title" idx="100" hasCustomPrompt="1"/>
           </p:nvPr>
         </p:nvSpPr>
         <p:spPr>
@@ -2689,7 +2489,7 @@
           <a:bodyPr wrap="square" lIns="0" tIns="0" rIns="0" bIns="0" rtlCol="0" anchor="ctr"/>
           <a:lstStyle/>
           <a:p>
-            <a:pPr algn="l" indent="0" marL="0">
+            <a:pPr marL="0" indent="0" algn="l">
               <a:buNone/>
             </a:pPr>
             <a:r>
@@ -2725,7 +2525,7 @@
           <a:bodyPr wrap="square" lIns="0" tIns="0" rIns="0" bIns="0" rtlCol="0" anchor="ctr"/>
           <a:lstStyle/>
           <a:p>
-            <a:pPr indent="0" marL="0">
+            <a:pPr marL="0" indent="0">
               <a:buNone/>
             </a:pPr>
             <a:r>
@@ -2761,7 +2561,7 @@
           <a:bodyPr wrap="square" lIns="0" tIns="0" rIns="0" bIns="0" rtlCol="0" anchor="ctr"/>
           <a:lstStyle/>
           <a:p>
-            <a:pPr indent="0" marL="0">
+            <a:pPr marL="0" indent="0">
               <a:buNone/>
             </a:pPr>
             <a:r>
@@ -2770,7 +2570,31 @@
                   <a:srgbClr val="FFFFFF"/>
                 </a:solidFill>
               </a:rPr>
-              <a:t>Người trình bày: [Họ tên của bạn]</a:t>
+              <a:t>Người trình </a:t>
+            </a:r>
+            <a:r>
+              <a:rPr lang="en-US" sz="3000" dirty="0" err="1">
+                <a:solidFill>
+                  <a:srgbClr val="FFFFFF"/>
+                </a:solidFill>
+              </a:rPr>
+              <a:t>bày</a:t>
+            </a:r>
+            <a:r>
+              <a:rPr lang="en-US" sz="3000" dirty="0">
+                <a:solidFill>
+                  <a:srgbClr val="FFFFFF"/>
+                </a:solidFill>
+              </a:rPr>
+              <a:t>: Võ </a:t>
+            </a:r>
+            <a:r>
+              <a:rPr lang="en-US" sz="3000">
+                <a:solidFill>
+                  <a:srgbClr val="FFFFFF"/>
+                </a:solidFill>
+              </a:rPr>
+              <a:t>Xuân Thịnh</a:t>
             </a:r>
             <a:endParaRPr lang="en-US" sz="3000" dirty="0"/>
           </a:p>
@@ -2862,9 +2686,11 @@
       <p:sp>
         <p:nvSpPr>
           <p:cNvPr id="2" name="Text 0"/>
-          <p:cNvSpPr/>
+          <p:cNvSpPr>
+            <a:spLocks noGrp="1"/>
+          </p:cNvSpPr>
           <p:nvPr>
-            <p:ph idx="100" type="title" hasCustomPrompt="1"/>
+            <p:ph type="title" idx="100" hasCustomPrompt="1"/>
           </p:nvPr>
         </p:nvSpPr>
         <p:spPr>
@@ -2882,7 +2708,7 @@
           <a:bodyPr wrap="square" lIns="0" tIns="0" rIns="0" bIns="0" rtlCol="0" anchor="ctr"/>
           <a:lstStyle/>
           <a:p>
-            <a:pPr algn="l" indent="0" marL="0">
+            <a:pPr marL="0" indent="0" algn="l">
               <a:buNone/>
             </a:pPr>
             <a:r>
@@ -2918,7 +2744,7 @@
           <a:bodyPr wrap="square" lIns="0" tIns="0" rIns="0" bIns="0" rtlCol="0" anchor="ctr"/>
           <a:lstStyle/>
           <a:p>
-            <a:pPr indent="0" marL="0">
+            <a:pPr marL="0" indent="0">
               <a:buNone/>
             </a:pPr>
             <a:r>
@@ -2935,7 +2761,7 @@
       </p:sp>
       <p:graphicFrame>
         <p:nvGraphicFramePr>
-          <p:cNvPr id="4" name="Bieu do doanh thu" descr=""/>
+          <p:cNvPr id="4" name="Bieu do doanh thu"/>
           <p:cNvGraphicFramePr/>
           <p:nvPr/>
         </p:nvGraphicFramePr>
@@ -2943,9 +2769,9 @@
           <a:off x="548640" y="2194560"/>
           <a:ext cx="11064240" cy="4480560"/>
         </p:xfrm>
-        <a:graphic xmlns:a="http://schemas.openxmlformats.org/drawingml/2006/main">
+        <a:graphic>
           <a:graphicData uri="http://schemas.openxmlformats.org/drawingml/2006/chart">
-            <c:chart xmlns:c="http://schemas.openxmlformats.org/drawingml/2006/chart" r:id="rId1"/>
+            <c:chart xmlns:c="http://schemas.openxmlformats.org/drawingml/2006/chart" xmlns:r="http://schemas.openxmlformats.org/officeDocument/2006/relationships" r:id="rId3"/>
           </a:graphicData>
         </a:graphic>
       </p:graphicFrame>
@@ -2977,9 +2803,11 @@
       <p:sp>
         <p:nvSpPr>
           <p:cNvPr id="2" name="Text 0"/>
-          <p:cNvSpPr/>
+          <p:cNvSpPr>
+            <a:spLocks noGrp="1"/>
+          </p:cNvSpPr>
           <p:nvPr>
-            <p:ph idx="100" type="title" hasCustomPrompt="1"/>
+            <p:ph type="title" idx="100" hasCustomPrompt="1"/>
           </p:nvPr>
         </p:nvSpPr>
         <p:spPr>
@@ -2997,7 +2825,7 @@
           <a:bodyPr wrap="square" lIns="0" tIns="0" rIns="0" bIns="0" rtlCol="0" anchor="ctr"/>
           <a:lstStyle/>
           <a:p>
-            <a:pPr algn="l" indent="0" marL="0">
+            <a:pPr marL="0" indent="0" algn="l">
               <a:buNone/>
             </a:pPr>
             <a:r>
@@ -3033,7 +2861,7 @@
           <a:bodyPr wrap="square" lIns="0" tIns="0" rIns="0" bIns="0" rtlCol="0" anchor="ctr"/>
           <a:lstStyle/>
           <a:p>
-            <a:pPr indent="0" marL="0">
+            <a:pPr marL="0" indent="0">
               <a:buNone/>
             </a:pPr>
             <a:r>
@@ -3050,7 +2878,7 @@
       </p:sp>
       <p:graphicFrame>
         <p:nvGraphicFramePr>
-          <p:cNvPr id="4" name="Bieu do so sanh" descr=""/>
+          <p:cNvPr id="4" name="Bieu do so sanh"/>
           <p:cNvGraphicFramePr/>
           <p:nvPr/>
         </p:nvGraphicFramePr>
@@ -3058,9 +2886,9 @@
           <a:off x="548640" y="2194560"/>
           <a:ext cx="11064240" cy="4480560"/>
         </p:xfrm>
-        <a:graphic xmlns:a="http://schemas.openxmlformats.org/drawingml/2006/main">
+        <a:graphic>
           <a:graphicData uri="http://schemas.openxmlformats.org/drawingml/2006/chart">
-            <c:chart xmlns:c="http://schemas.openxmlformats.org/drawingml/2006/chart" r:id="rId1"/>
+            <c:chart xmlns:c="http://schemas.openxmlformats.org/drawingml/2006/chart" xmlns:r="http://schemas.openxmlformats.org/officeDocument/2006/relationships" r:id="rId3"/>
           </a:graphicData>
         </a:graphic>
       </p:graphicFrame>
@@ -3092,9 +2920,11 @@
       <p:sp>
         <p:nvSpPr>
           <p:cNvPr id="2" name="Text 0"/>
-          <p:cNvSpPr/>
+          <p:cNvSpPr>
+            <a:spLocks noGrp="1"/>
+          </p:cNvSpPr>
           <p:nvPr>
-            <p:ph idx="100" type="title" hasCustomPrompt="1"/>
+            <p:ph type="title" idx="100" hasCustomPrompt="1"/>
           </p:nvPr>
         </p:nvSpPr>
         <p:spPr>
@@ -3112,7 +2942,7 @@
           <a:bodyPr wrap="square" lIns="0" tIns="0" rIns="0" bIns="0" rtlCol="0" anchor="ctr"/>
           <a:lstStyle/>
           <a:p>
-            <a:pPr algn="l" indent="0" marL="0">
+            <a:pPr marL="0" indent="0" algn="l">
               <a:buNone/>
             </a:pPr>
             <a:r>
@@ -3129,7 +2959,7 @@
       </p:sp>
       <p:graphicFrame>
         <p:nvGraphicFramePr>
-          <p:cNvPr id="3" name="Bieu do co cau chi phi" descr=""/>
+          <p:cNvPr id="3" name="Bieu do co cau chi phi"/>
           <p:cNvGraphicFramePr/>
           <p:nvPr/>
         </p:nvGraphicFramePr>
@@ -3137,9 +2967,9 @@
           <a:off x="548640" y="1828800"/>
           <a:ext cx="11064240" cy="4846320"/>
         </p:xfrm>
-        <a:graphic xmlns:a="http://schemas.openxmlformats.org/drawingml/2006/main">
+        <a:graphic>
           <a:graphicData uri="http://schemas.openxmlformats.org/drawingml/2006/chart">
-            <c:chart xmlns:c="http://schemas.openxmlformats.org/drawingml/2006/chart" r:id="rId1"/>
+            <c:chart xmlns:c="http://schemas.openxmlformats.org/drawingml/2006/chart" xmlns:r="http://schemas.openxmlformats.org/officeDocument/2006/relationships" r:id="rId3"/>
           </a:graphicData>
         </a:graphic>
       </p:graphicFrame>
@@ -3171,9 +3001,11 @@
       <p:sp>
         <p:nvSpPr>
           <p:cNvPr id="2" name="Text 0"/>
-          <p:cNvSpPr/>
+          <p:cNvSpPr>
+            <a:spLocks noGrp="1"/>
+          </p:cNvSpPr>
           <p:nvPr>
-            <p:ph idx="100" type="title" hasCustomPrompt="1"/>
+            <p:ph type="title" idx="100" hasCustomPrompt="1"/>
           </p:nvPr>
         </p:nvSpPr>
         <p:spPr>
@@ -3191,7 +3023,7 @@
           <a:bodyPr wrap="square" lIns="0" tIns="0" rIns="0" bIns="0" rtlCol="0" anchor="ctr"/>
           <a:lstStyle/>
           <a:p>
-            <a:pPr algn="l" indent="0" marL="0">
+            <a:pPr marL="0" indent="0" algn="l">
               <a:buNone/>
             </a:pPr>
             <a:r>
@@ -3227,7 +3059,7 @@
           <a:bodyPr wrap="square" lIns="0" tIns="0" rIns="0" bIns="0" rtlCol="0" anchor="ctr"/>
           <a:lstStyle/>
           <a:p>
-            <a:pPr indent="0" marL="0">
+            <a:pPr marL="0" indent="0">
               <a:buNone/>
             </a:pPr>
             <a:r>
@@ -3244,7 +3076,7 @@
       </p:sp>
       <p:graphicFrame>
         <p:nvGraphicFramePr>
-          <p:cNvPr id="4" name="Bieu do phi ngan hang" descr=""/>
+          <p:cNvPr id="4" name="Bieu do phi ngan hang"/>
           <p:cNvGraphicFramePr/>
           <p:nvPr/>
         </p:nvGraphicFramePr>
@@ -3252,9 +3084,9 @@
           <a:off x="548640" y="2194560"/>
           <a:ext cx="11064240" cy="4480560"/>
         </p:xfrm>
-        <a:graphic xmlns:a="http://schemas.openxmlformats.org/drawingml/2006/main">
+        <a:graphic>
           <a:graphicData uri="http://schemas.openxmlformats.org/drawingml/2006/chart">
-            <c:chart xmlns:c="http://schemas.openxmlformats.org/drawingml/2006/chart" r:id="rId1"/>
+            <c:chart xmlns:c="http://schemas.openxmlformats.org/drawingml/2006/chart" xmlns:r="http://schemas.openxmlformats.org/officeDocument/2006/relationships" r:id="rId3"/>
           </a:graphicData>
         </a:graphic>
       </p:graphicFrame>
@@ -3286,9 +3118,11 @@
       <p:sp>
         <p:nvSpPr>
           <p:cNvPr id="2" name="Text 0"/>
-          <p:cNvSpPr/>
+          <p:cNvSpPr>
+            <a:spLocks noGrp="1"/>
+          </p:cNvSpPr>
           <p:nvPr>
-            <p:ph idx="100" type="title" hasCustomPrompt="1"/>
+            <p:ph type="title" idx="100" hasCustomPrompt="1"/>
           </p:nvPr>
         </p:nvSpPr>
         <p:spPr>
@@ -3306,7 +3140,7 @@
           <a:bodyPr wrap="square" lIns="0" tIns="0" rIns="0" bIns="0" rtlCol="0" anchor="ctr"/>
           <a:lstStyle/>
           <a:p>
-            <a:pPr algn="l" indent="0" marL="0">
+            <a:pPr marL="0" indent="0" algn="l">
               <a:buNone/>
             </a:pPr>
             <a:r>
@@ -3369,7 +3203,7 @@
           <a:bodyPr wrap="square" lIns="0" tIns="0" rIns="0" bIns="0" rtlCol="0" anchor="ctr"/>
           <a:lstStyle/>
           <a:p>
-            <a:pPr algn="ctr" indent="0" marL="0">
+            <a:pPr marL="0" indent="0" algn="ctr">
               <a:buNone/>
             </a:pPr>
             <a:r>
@@ -3405,7 +3239,7 @@
           <a:bodyPr wrap="square" lIns="0" tIns="0" rIns="0" bIns="0" rtlCol="0" anchor="ctr"/>
           <a:lstStyle/>
           <a:p>
-            <a:pPr algn="ctr" indent="0" marL="0">
+            <a:pPr marL="0" indent="0" algn="ctr">
               <a:buNone/>
             </a:pPr>
             <a:r>
@@ -3468,7 +3302,7 @@
           <a:bodyPr wrap="square" lIns="0" tIns="0" rIns="0" bIns="0" rtlCol="0" anchor="ctr"/>
           <a:lstStyle/>
           <a:p>
-            <a:pPr algn="ctr" indent="0" marL="0">
+            <a:pPr marL="0" indent="0" algn="ctr">
               <a:buNone/>
             </a:pPr>
             <a:r>
@@ -3504,7 +3338,7 @@
           <a:bodyPr wrap="square" lIns="0" tIns="0" rIns="0" bIns="0" rtlCol="0" anchor="ctr"/>
           <a:lstStyle/>
           <a:p>
-            <a:pPr algn="ctr" indent="0" marL="0">
+            <a:pPr marL="0" indent="0" algn="ctr">
               <a:buNone/>
             </a:pPr>
             <a:r>
@@ -3567,7 +3401,7 @@
           <a:bodyPr wrap="square" lIns="0" tIns="0" rIns="0" bIns="0" rtlCol="0" anchor="ctr"/>
           <a:lstStyle/>
           <a:p>
-            <a:pPr algn="ctr" indent="0" marL="0">
+            <a:pPr marL="0" indent="0" algn="ctr">
               <a:buNone/>
             </a:pPr>
             <a:r>
@@ -3603,7 +3437,7 @@
           <a:bodyPr wrap="square" lIns="0" tIns="0" rIns="0" bIns="0" rtlCol="0" anchor="ctr"/>
           <a:lstStyle/>
           <a:p>
-            <a:pPr algn="ctr" indent="0" marL="0">
+            <a:pPr marL="0" indent="0" algn="ctr">
               <a:buNone/>
             </a:pPr>
             <a:r>
@@ -3977,4 +3811,319 @@
     </a:ext>
   </a:extLst>
 </a:theme>
+</file>
+
+<file path=ppt/theme/theme2.xml><?xml version="1.0" encoding="utf-8"?>
+<a:theme xmlns:a="http://schemas.openxmlformats.org/drawingml/2006/main" name="Office Theme">
+  <a:themeElements>
+    <a:clrScheme name="Office">
+      <a:dk1>
+        <a:sysClr val="windowText" lastClr="000000"/>
+      </a:dk1>
+      <a:lt1>
+        <a:sysClr val="window" lastClr="FFFFFF"/>
+      </a:lt1>
+      <a:dk2>
+        <a:srgbClr val="0E2841"/>
+      </a:dk2>
+      <a:lt2>
+        <a:srgbClr val="E8E8E8"/>
+      </a:lt2>
+      <a:accent1>
+        <a:srgbClr val="156082"/>
+      </a:accent1>
+      <a:accent2>
+        <a:srgbClr val="E97132"/>
+      </a:accent2>
+      <a:accent3>
+        <a:srgbClr val="196B24"/>
+      </a:accent3>
+      <a:accent4>
+        <a:srgbClr val="0F9ED5"/>
+      </a:accent4>
+      <a:accent5>
+        <a:srgbClr val="A02B93"/>
+      </a:accent5>
+      <a:accent6>
+        <a:srgbClr val="4EA72E"/>
+      </a:accent6>
+      <a:hlink>
+        <a:srgbClr val="467886"/>
+      </a:hlink>
+      <a:folHlink>
+        <a:srgbClr val="96607D"/>
+      </a:folHlink>
+    </a:clrScheme>
+    <a:fontScheme name="Office">
+      <a:majorFont>
+        <a:latin typeface="Aptos Display" panose="02110004020202020204"/>
+        <a:ea typeface=""/>
+        <a:cs typeface=""/>
+        <a:font script="Jpan" typeface="游ゴシック Light"/>
+        <a:font script="Hang" typeface="맑은 고딕"/>
+        <a:font script="Hans" typeface="等线 Light"/>
+        <a:font script="Hant" typeface="新細明體"/>
+        <a:font script="Arab" typeface="Times New Roman"/>
+        <a:font script="Hebr" typeface="Times New Roman"/>
+        <a:font script="Thai" typeface="Angsana New"/>
+        <a:font script="Ethi" typeface="Nyala"/>
+        <a:font script="Beng" typeface="Vrinda"/>
+        <a:font script="Gujr" typeface="Shruti"/>
+        <a:font script="Khmr" typeface="MoolBoran"/>
+        <a:font script="Knda" typeface="Tunga"/>
+        <a:font script="Guru" typeface="Raavi"/>
+        <a:font script="Cans" typeface="Euphemia"/>
+        <a:font script="Cher" typeface="Plantagenet Cherokee"/>
+        <a:font script="Yiii" typeface="Microsoft Yi Baiti"/>
+        <a:font script="Tibt" typeface="Microsoft Himalaya"/>
+        <a:font script="Thaa" typeface="MV Boli"/>
+        <a:font script="Deva" typeface="Mangal"/>
+        <a:font script="Telu" typeface="Gautami"/>
+        <a:font script="Taml" typeface="Latha"/>
+        <a:font script="Syrc" typeface="Estrangelo Edessa"/>
+        <a:font script="Orya" typeface="Kalinga"/>
+        <a:font script="Mlym" typeface="Kartika"/>
+        <a:font script="Laoo" typeface="DokChampa"/>
+        <a:font script="Sinh" typeface="Iskoola Pota"/>
+        <a:font script="Mong" typeface="Mongolian Baiti"/>
+        <a:font script="Viet" typeface="Times New Roman"/>
+        <a:font script="Uigh" typeface="Microsoft Uighur"/>
+        <a:font script="Geor" typeface="Sylfaen"/>
+        <a:font script="Armn" typeface="Arial"/>
+        <a:font script="Bugi" typeface="Leelawadee UI"/>
+        <a:font script="Bopo" typeface="Microsoft JhengHei"/>
+        <a:font script="Java" typeface="Javanese Text"/>
+        <a:font script="Lisu" typeface="Segoe UI"/>
+        <a:font script="Mymr" typeface="Myanmar Text"/>
+        <a:font script="Nkoo" typeface="Ebrima"/>
+        <a:font script="Olck" typeface="Nirmala UI"/>
+        <a:font script="Osma" typeface="Ebrima"/>
+        <a:font script="Phag" typeface="Phagspa"/>
+        <a:font script="Syrn" typeface="Estrangelo Edessa"/>
+        <a:font script="Syrj" typeface="Estrangelo Edessa"/>
+        <a:font script="Syre" typeface="Estrangelo Edessa"/>
+        <a:font script="Sora" typeface="Nirmala UI"/>
+        <a:font script="Tale" typeface="Microsoft Tai Le"/>
+        <a:font script="Talu" typeface="Microsoft New Tai Lue"/>
+        <a:font script="Tfng" typeface="Ebrima"/>
+      </a:majorFont>
+      <a:minorFont>
+        <a:latin typeface="Aptos" panose="02110004020202020204"/>
+        <a:ea typeface=""/>
+        <a:cs typeface=""/>
+        <a:font script="Jpan" typeface="游ゴシック"/>
+        <a:font script="Hang" typeface="맑은 고딕"/>
+        <a:font script="Hans" typeface="等线"/>
+        <a:font script="Hant" typeface="新細明體"/>
+        <a:font script="Arab" typeface="Arial"/>
+        <a:font script="Hebr" typeface="Arial"/>
+        <a:font script="Thai" typeface="Cordia New"/>
+        <a:font script="Ethi" typeface="Nyala"/>
+        <a:font script="Beng" typeface="Vrinda"/>
+        <a:font script="Gujr" typeface="Shruti"/>
+        <a:font script="Khmr" typeface="DaunPenh"/>
+        <a:font script="Knda" typeface="Tunga"/>
+        <a:font script="Guru" typeface="Raavi"/>
+        <a:font script="Cans" typeface="Euphemia"/>
+        <a:font script="Cher" typeface="Plantagenet Cherokee"/>
+        <a:font script="Yiii" typeface="Microsoft Yi Baiti"/>
+        <a:font script="Tibt" typeface="Microsoft Himalaya"/>
+        <a:font script="Thaa" typeface="MV Boli"/>
+        <a:font script="Deva" typeface="Mangal"/>
+        <a:font script="Telu" typeface="Gautami"/>
+        <a:font script="Taml" typeface="Latha"/>
+        <a:font script="Syrc" typeface="Estrangelo Edessa"/>
+        <a:font script="Orya" typeface="Kalinga"/>
+        <a:font script="Mlym" typeface="Kartika"/>
+        <a:font script="Laoo" typeface="DokChampa"/>
+        <a:font script="Sinh" typeface="Iskoola Pota"/>
+        <a:font script="Mong" typeface="Mongolian Baiti"/>
+        <a:font script="Viet" typeface="Arial"/>
+        <a:font script="Uigh" typeface="Microsoft Uighur"/>
+        <a:font script="Geor" typeface="Sylfaen"/>
+        <a:font script="Armn" typeface="Arial"/>
+        <a:font script="Bugi" typeface="Leelawadee UI"/>
+        <a:font script="Bopo" typeface="Microsoft JhengHei"/>
+        <a:font script="Java" typeface="Javanese Text"/>
+        <a:font script="Lisu" typeface="Segoe UI"/>
+        <a:font script="Mymr" typeface="Myanmar Text"/>
+        <a:font script="Nkoo" typeface="Ebrima"/>
+        <a:font script="Olck" typeface="Nirmala UI"/>
+        <a:font script="Osma" typeface="Ebrima"/>
+        <a:font script="Phag" typeface="Phagspa"/>
+        <a:font script="Syrn" typeface="Estrangelo Edessa"/>
+        <a:font script="Syrj" typeface="Estrangelo Edessa"/>
+        <a:font script="Syre" typeface="Estrangelo Edessa"/>
+        <a:font script="Sora" typeface="Nirmala UI"/>
+        <a:font script="Tale" typeface="Microsoft Tai Le"/>
+        <a:font script="Talu" typeface="Microsoft New Tai Lue"/>
+        <a:font script="Tfng" typeface="Ebrima"/>
+      </a:minorFont>
+    </a:fontScheme>
+    <a:fmtScheme name="Office">
+      <a:fillStyleLst>
+        <a:solidFill>
+          <a:schemeClr val="phClr"/>
+        </a:solidFill>
+        <a:gradFill rotWithShape="1">
+          <a:gsLst>
+            <a:gs pos="0">
+              <a:schemeClr val="phClr">
+                <a:lumMod val="110000"/>
+                <a:satMod val="105000"/>
+                <a:tint val="67000"/>
+              </a:schemeClr>
+            </a:gs>
+            <a:gs pos="50000">
+              <a:schemeClr val="phClr">
+                <a:lumMod val="105000"/>
+                <a:satMod val="103000"/>
+                <a:tint val="73000"/>
+              </a:schemeClr>
+            </a:gs>
+            <a:gs pos="100000">
+              <a:schemeClr val="phClr">
+                <a:lumMod val="105000"/>
+                <a:satMod val="109000"/>
+                <a:tint val="81000"/>
+              </a:schemeClr>
+            </a:gs>
+          </a:gsLst>
+          <a:lin ang="5400000" scaled="0"/>
+        </a:gradFill>
+        <a:gradFill rotWithShape="1">
+          <a:gsLst>
+            <a:gs pos="0">
+              <a:schemeClr val="phClr">
+                <a:satMod val="103000"/>
+                <a:lumMod val="102000"/>
+                <a:tint val="94000"/>
+              </a:schemeClr>
+            </a:gs>
+            <a:gs pos="50000">
+              <a:schemeClr val="phClr">
+                <a:satMod val="110000"/>
+                <a:lumMod val="100000"/>
+                <a:shade val="100000"/>
+              </a:schemeClr>
+            </a:gs>
+            <a:gs pos="100000">
+              <a:schemeClr val="phClr">
+                <a:lumMod val="99000"/>
+                <a:satMod val="120000"/>
+                <a:shade val="78000"/>
+              </a:schemeClr>
+            </a:gs>
+          </a:gsLst>
+          <a:lin ang="5400000" scaled="0"/>
+        </a:gradFill>
+      </a:fillStyleLst>
+      <a:lnStyleLst>
+        <a:ln w="12700" cap="flat" cmpd="sng" algn="ctr">
+          <a:solidFill>
+            <a:schemeClr val="phClr"/>
+          </a:solidFill>
+          <a:prstDash val="solid"/>
+          <a:miter lim="800000"/>
+        </a:ln>
+        <a:ln w="19050" cap="flat" cmpd="sng" algn="ctr">
+          <a:solidFill>
+            <a:schemeClr val="phClr"/>
+          </a:solidFill>
+          <a:prstDash val="solid"/>
+          <a:miter lim="800000"/>
+        </a:ln>
+        <a:ln w="25400" cap="flat" cmpd="sng" algn="ctr">
+          <a:solidFill>
+            <a:schemeClr val="phClr"/>
+          </a:solidFill>
+          <a:prstDash val="solid"/>
+          <a:miter lim="800000"/>
+        </a:ln>
+      </a:lnStyleLst>
+      <a:effectStyleLst>
+        <a:effectStyle>
+          <a:effectLst/>
+        </a:effectStyle>
+        <a:effectStyle>
+          <a:effectLst/>
+        </a:effectStyle>
+        <a:effectStyle>
+          <a:effectLst>
+            <a:outerShdw blurRad="57150" dist="19050" dir="5400000" algn="ctr" rotWithShape="0">
+              <a:srgbClr val="000000">
+                <a:alpha val="63000"/>
+              </a:srgbClr>
+            </a:outerShdw>
+          </a:effectLst>
+        </a:effectStyle>
+      </a:effectStyleLst>
+      <a:bgFillStyleLst>
+        <a:solidFill>
+          <a:schemeClr val="phClr"/>
+        </a:solidFill>
+        <a:solidFill>
+          <a:schemeClr val="phClr">
+            <a:tint val="95000"/>
+            <a:satMod val="170000"/>
+          </a:schemeClr>
+        </a:solidFill>
+        <a:gradFill rotWithShape="1">
+          <a:gsLst>
+            <a:gs pos="0">
+              <a:schemeClr val="phClr">
+                <a:tint val="93000"/>
+                <a:satMod val="150000"/>
+                <a:shade val="98000"/>
+                <a:lumMod val="102000"/>
+              </a:schemeClr>
+            </a:gs>
+            <a:gs pos="50000">
+              <a:schemeClr val="phClr">
+                <a:tint val="98000"/>
+                <a:satMod val="130000"/>
+                <a:shade val="90000"/>
+                <a:lumMod val="103000"/>
+              </a:schemeClr>
+            </a:gs>
+            <a:gs pos="100000">
+              <a:schemeClr val="phClr">
+                <a:shade val="63000"/>
+                <a:satMod val="120000"/>
+              </a:schemeClr>
+            </a:gs>
+          </a:gsLst>
+          <a:lin ang="5400000" scaled="0"/>
+        </a:gradFill>
+      </a:bgFillStyleLst>
+    </a:fmtScheme>
+  </a:themeElements>
+  <a:objectDefaults>
+    <a:lnDef>
+      <a:spPr/>
+      <a:bodyPr/>
+      <a:lstStyle/>
+      <a:style>
+        <a:lnRef idx="2">
+          <a:schemeClr val="accent1"/>
+        </a:lnRef>
+        <a:fillRef idx="0">
+          <a:schemeClr val="accent1"/>
+        </a:fillRef>
+        <a:effectRef idx="1">
+          <a:schemeClr val="accent1"/>
+        </a:effectRef>
+        <a:fontRef idx="minor">
+          <a:schemeClr val="tx1"/>
+        </a:fontRef>
+      </a:style>
+    </a:lnDef>
+  </a:objectDefaults>
+  <a:extraClrSchemeLst/>
+  <a:extLst>
+    <a:ext uri="{05A4C25C-085E-4340-85A3-A5531E510DB2}">
+      <thm15:themeFamily xmlns:thm15="http://schemas.microsoft.com/office/thememl/2012/main" name="Office Theme" id="{2E142A2C-CD16-42D6-873A-C26D2A0506FA}" vid="{1BDDFF52-6CD6-40A5-AB3C-68EB2F1E4D0A}"/>
+    </a:ext>
+  </a:extLst>
+</a:theme>
 </file>